--- a/cmsc125/ostep/slides/01.Virtualization/19.Translation_Lookaside_Buffers.pptx
+++ b/cmsc125/ostep/slides/01.Virtualization/19.Translation_Lookaside_Buffers.pptx
@@ -257,7 +257,7 @@
           <a:p>
             <a:fld id="{050F0499-AE52-4672-879B-3107B2FC2A9F}" type="datetimeFigureOut">
               <a:rPr lang="ko-KR" altLang="en-US" smtClean="0"/>
-              <a:t>2021-10-27</a:t>
+              <a:t>2024-10-10</a:t>
             </a:fld>
             <a:endParaRPr lang="ko-KR" altLang="en-US"/>
           </a:p>
@@ -20835,7 +20835,7 @@
         </p:nvSpPr>
         <p:spPr bwMode="auto">
           <a:xfrm>
-            <a:off x="1738313" y="880070"/>
+            <a:off x="1372545" y="908720"/>
             <a:ext cx="8786812" cy="5501258"/>
           </a:xfrm>
           <a:prstGeom prst="rect">
@@ -25614,8 +25614,8 @@
         </p:nvSpPr>
         <p:spPr>
           <a:xfrm>
-            <a:off x="3450141" y="1124744"/>
-            <a:ext cx="5628179" cy="369332"/>
+            <a:off x="2738759" y="1111638"/>
+            <a:ext cx="6606299" cy="369332"/>
           </a:xfrm>
           <a:prstGeom prst="rect">
             <a:avLst/>
@@ -25637,7 +25637,7 @@
                 <a:latin typeface="맑은 고딕" pitchFamily="50" charset="-127"/>
                 <a:ea typeface="맑은 고딕" pitchFamily="50" charset="-127"/>
               </a:rPr>
-              <a:t>All 64 bits of this TLB entry(example of MIPS R4000)</a:t>
+              <a:t>All 64 bits (4 bytes) of this TLB entry(example of MIPS R4000)</a:t>
             </a:r>
           </a:p>
         </p:txBody>
@@ -29414,7 +29414,7 @@
                 <a:latin typeface="맑은 고딕" panose="020B0503020000020004" pitchFamily="50" charset="-127"/>
                 <a:ea typeface="맑은 고딕" panose="020B0503020000020004" pitchFamily="50" charset="-127"/>
               </a:rPr>
-              <a:t>Logical </a:t>
+              <a:t>Virtual </a:t>
             </a:r>
           </a:p>
           <a:p>
@@ -35149,7 +35149,7 @@
           <a:lstStyle/>
           <a:p>
             <a:r>
-              <a:rPr lang="en-US" altLang="ko-KR" dirty="0"/>
+              <a:rPr lang="en-US" altLang="ko-KR" b="1" dirty="0"/>
               <a:t>Temporal Locality</a:t>
             </a:r>
           </a:p>
@@ -35171,10 +35171,10 @@
           </a:p>
           <a:p>
             <a:r>
-              <a:rPr lang="en-US" altLang="ko-KR" dirty="0"/>
+              <a:rPr lang="en-US" altLang="ko-KR" b="1" dirty="0"/>
               <a:t>Spatial Locality</a:t>
             </a:r>
-            <a:endParaRPr lang="en-US" altLang="ko-KR" i="1" dirty="0"/>
+            <a:endParaRPr lang="en-US" altLang="ko-KR" b="1" i="1" dirty="0"/>
           </a:p>
           <a:p>
             <a:pPr lvl="1"/>
